--- a/assets/images/PV_logo.pptx
+++ b/assets/images/PV_logo.pptx
@@ -104,6 +104,11 @@
       </a:defRPr>
     </a:lvl9pPr>
   </p:defaultTextStyle>
+  <p:extLst>
+    <p:ext uri="{EFAFB233-063F-42B5-8137-9DF3F51BA10A}">
+      <p15:sldGuideLst xmlns:p15="http://schemas.microsoft.com/office/powerpoint/2012/main"/>
+    </p:ext>
+  </p:extLst>
 </p:presentation>
 </file>
 
@@ -238,7 +243,7 @@
           <a:p>
             <a:fld id="{CB9327A6-6E4D-4D84-8288-EF901B68E2D9}" type="datetimeFigureOut">
               <a:rPr lang="en-IN" smtClean="0"/>
-              <a:t>22-09-2026</a:t>
+              <a:t>23-09-2026</a:t>
             </a:fld>
             <a:endParaRPr lang="en-IN"/>
           </a:p>
@@ -408,7 +413,7 @@
           <a:p>
             <a:fld id="{CB9327A6-6E4D-4D84-8288-EF901B68E2D9}" type="datetimeFigureOut">
               <a:rPr lang="en-IN" smtClean="0"/>
-              <a:t>22-09-2026</a:t>
+              <a:t>23-09-2026</a:t>
             </a:fld>
             <a:endParaRPr lang="en-IN"/>
           </a:p>
@@ -588,7 +593,7 @@
           <a:p>
             <a:fld id="{CB9327A6-6E4D-4D84-8288-EF901B68E2D9}" type="datetimeFigureOut">
               <a:rPr lang="en-IN" smtClean="0"/>
-              <a:t>22-09-2026</a:t>
+              <a:t>23-09-2026</a:t>
             </a:fld>
             <a:endParaRPr lang="en-IN"/>
           </a:p>
@@ -758,7 +763,7 @@
           <a:p>
             <a:fld id="{CB9327A6-6E4D-4D84-8288-EF901B68E2D9}" type="datetimeFigureOut">
               <a:rPr lang="en-IN" smtClean="0"/>
-              <a:t>22-09-2026</a:t>
+              <a:t>23-09-2026</a:t>
             </a:fld>
             <a:endParaRPr lang="en-IN"/>
           </a:p>
@@ -1004,7 +1009,7 @@
           <a:p>
             <a:fld id="{CB9327A6-6E4D-4D84-8288-EF901B68E2D9}" type="datetimeFigureOut">
               <a:rPr lang="en-IN" smtClean="0"/>
-              <a:t>22-09-2026</a:t>
+              <a:t>23-09-2026</a:t>
             </a:fld>
             <a:endParaRPr lang="en-IN"/>
           </a:p>
@@ -1236,7 +1241,7 @@
           <a:p>
             <a:fld id="{CB9327A6-6E4D-4D84-8288-EF901B68E2D9}" type="datetimeFigureOut">
               <a:rPr lang="en-IN" smtClean="0"/>
-              <a:t>22-09-2026</a:t>
+              <a:t>23-09-2026</a:t>
             </a:fld>
             <a:endParaRPr lang="en-IN"/>
           </a:p>
@@ -1603,7 +1608,7 @@
           <a:p>
             <a:fld id="{CB9327A6-6E4D-4D84-8288-EF901B68E2D9}" type="datetimeFigureOut">
               <a:rPr lang="en-IN" smtClean="0"/>
-              <a:t>22-09-2026</a:t>
+              <a:t>23-09-2026</a:t>
             </a:fld>
             <a:endParaRPr lang="en-IN"/>
           </a:p>
@@ -1721,7 +1726,7 @@
           <a:p>
             <a:fld id="{CB9327A6-6E4D-4D84-8288-EF901B68E2D9}" type="datetimeFigureOut">
               <a:rPr lang="en-IN" smtClean="0"/>
-              <a:t>22-09-2026</a:t>
+              <a:t>23-09-2026</a:t>
             </a:fld>
             <a:endParaRPr lang="en-IN"/>
           </a:p>
@@ -1816,7 +1821,7 @@
           <a:p>
             <a:fld id="{CB9327A6-6E4D-4D84-8288-EF901B68E2D9}" type="datetimeFigureOut">
               <a:rPr lang="en-IN" smtClean="0"/>
-              <a:t>22-09-2026</a:t>
+              <a:t>23-09-2026</a:t>
             </a:fld>
             <a:endParaRPr lang="en-IN"/>
           </a:p>
@@ -2093,7 +2098,7 @@
           <a:p>
             <a:fld id="{CB9327A6-6E4D-4D84-8288-EF901B68E2D9}" type="datetimeFigureOut">
               <a:rPr lang="en-IN" smtClean="0"/>
-              <a:t>22-09-2026</a:t>
+              <a:t>23-09-2026</a:t>
             </a:fld>
             <a:endParaRPr lang="en-IN"/>
           </a:p>
@@ -2350,7 +2355,7 @@
           <a:p>
             <a:fld id="{CB9327A6-6E4D-4D84-8288-EF901B68E2D9}" type="datetimeFigureOut">
               <a:rPr lang="en-IN" smtClean="0"/>
-              <a:t>22-09-2026</a:t>
+              <a:t>23-09-2026</a:t>
             </a:fld>
             <a:endParaRPr lang="en-IN"/>
           </a:p>
@@ -2563,7 +2568,7 @@
           <a:p>
             <a:fld id="{CB9327A6-6E4D-4D84-8288-EF901B68E2D9}" type="datetimeFigureOut">
               <a:rPr lang="en-IN" smtClean="0"/>
-              <a:t>22-09-2026</a:t>
+              <a:t>23-09-2026</a:t>
             </a:fld>
             <a:endParaRPr lang="en-IN"/>
           </a:p>
@@ -2954,14 +2959,6 @@
 <file path=ppt/slides/slide1.xml><?xml version="1.0" encoding="utf-8"?>
 <p:sld xmlns:a="http://schemas.openxmlformats.org/drawingml/2006/main" xmlns:r="http://schemas.openxmlformats.org/officeDocument/2006/relationships" xmlns:p="http://schemas.openxmlformats.org/presentationml/2006/main">
   <p:cSld>
-    <p:bg>
-      <p:bgPr>
-        <a:solidFill>
-          <a:schemeClr val="tx1"/>
-        </a:solidFill>
-        <a:effectLst/>
-      </p:bgPr>
-    </p:bg>
     <p:spTree>
       <p:nvGrpSpPr>
         <p:cNvPr id="1" name=""/>
@@ -2976,6 +2973,58 @@
           <a:chExt cx="0" cy="0"/>
         </a:xfrm>
       </p:grpSpPr>
+      <p:sp>
+        <p:nvSpPr>
+          <p:cNvPr id="2" name="Rectangle: Rounded Corners 1">
+            <a:extLst>
+              <a:ext uri="{FF2B5EF4-FFF2-40B4-BE49-F238E27FC236}">
+                <a16:creationId xmlns:a16="http://schemas.microsoft.com/office/drawing/2014/main" id="{66B8EB38-0CEA-8E24-0679-E1F488268DD9}"/>
+              </a:ext>
+            </a:extLst>
+          </p:cNvPr>
+          <p:cNvSpPr/>
+          <p:nvPr/>
+        </p:nvSpPr>
+        <p:spPr>
+          <a:xfrm>
+            <a:off x="0" y="0"/>
+            <a:ext cx="10799762" cy="10799762"/>
+          </a:xfrm>
+          <a:prstGeom prst="roundRect">
+            <a:avLst/>
+          </a:prstGeom>
+          <a:solidFill>
+            <a:schemeClr val="tx1"/>
+          </a:solidFill>
+          <a:ln>
+            <a:noFill/>
+          </a:ln>
+        </p:spPr>
+        <p:style>
+          <a:lnRef idx="2">
+            <a:schemeClr val="accent1">
+              <a:shade val="15000"/>
+            </a:schemeClr>
+          </a:lnRef>
+          <a:fillRef idx="1">
+            <a:schemeClr val="accent1"/>
+          </a:fillRef>
+          <a:effectRef idx="0">
+            <a:schemeClr val="accent1"/>
+          </a:effectRef>
+          <a:fontRef idx="minor">
+            <a:schemeClr val="lt1"/>
+          </a:fontRef>
+        </p:style>
+        <p:txBody>
+          <a:bodyPr rtlCol="0" anchor="ctr"/>
+          <a:lstStyle/>
+          <a:p>
+            <a:pPr algn="ctr"/>
+            <a:endParaRPr lang="en-IN"/>
+          </a:p>
+        </p:txBody>
+      </p:sp>
       <p:sp>
         <p:nvSpPr>
           <p:cNvPr id="5" name="TextBox 4">

--- a/assets/images/PV_logo.pptx
+++ b/assets/images/PV_logo.pptx
@@ -2973,109 +2973,130 @@
           <a:chExt cx="0" cy="0"/>
         </a:xfrm>
       </p:grpSpPr>
-      <p:sp>
-        <p:nvSpPr>
-          <p:cNvPr id="2" name="Rectangle: Rounded Corners 1">
+      <p:grpSp>
+        <p:nvGrpSpPr>
+          <p:cNvPr id="3" name="Group 2">
             <a:extLst>
               <a:ext uri="{FF2B5EF4-FFF2-40B4-BE49-F238E27FC236}">
-                <a16:creationId xmlns:a16="http://schemas.microsoft.com/office/drawing/2014/main" id="{66B8EB38-0CEA-8E24-0679-E1F488268DD9}"/>
+                <a16:creationId xmlns:a16="http://schemas.microsoft.com/office/drawing/2014/main" id="{8B8D75D3-03D2-4076-C979-945CBC941AFD}"/>
               </a:ext>
             </a:extLst>
           </p:cNvPr>
-          <p:cNvSpPr/>
+          <p:cNvGrpSpPr/>
           <p:nvPr/>
-        </p:nvSpPr>
-        <p:spPr>
+        </p:nvGrpSpPr>
+        <p:grpSpPr>
           <a:xfrm>
             <a:off x="0" y="0"/>
             <a:ext cx="10799762" cy="10799762"/>
+            <a:chOff x="0" y="0"/>
+            <a:chExt cx="10799762" cy="10799762"/>
           </a:xfrm>
-          <a:prstGeom prst="roundRect">
-            <a:avLst/>
-          </a:prstGeom>
-          <a:solidFill>
-            <a:schemeClr val="tx1"/>
-          </a:solidFill>
-          <a:ln>
+        </p:grpSpPr>
+        <p:sp>
+          <p:nvSpPr>
+            <p:cNvPr id="2" name="Rectangle: Rounded Corners 1">
+              <a:extLst>
+                <a:ext uri="{FF2B5EF4-FFF2-40B4-BE49-F238E27FC236}">
+                  <a16:creationId xmlns:a16="http://schemas.microsoft.com/office/drawing/2014/main" id="{66B8EB38-0CEA-8E24-0679-E1F488268DD9}"/>
+                </a:ext>
+              </a:extLst>
+            </p:cNvPr>
+            <p:cNvSpPr/>
+            <p:nvPr/>
+          </p:nvSpPr>
+          <p:spPr>
+            <a:xfrm>
+              <a:off x="0" y="0"/>
+              <a:ext cx="10799762" cy="10799762"/>
+            </a:xfrm>
+            <a:prstGeom prst="roundRect">
+              <a:avLst/>
+            </a:prstGeom>
+            <a:solidFill>
+              <a:schemeClr val="tx1"/>
+            </a:solidFill>
+            <a:ln>
+              <a:noFill/>
+            </a:ln>
+          </p:spPr>
+          <p:style>
+            <a:lnRef idx="2">
+              <a:schemeClr val="accent1">
+                <a:shade val="15000"/>
+              </a:schemeClr>
+            </a:lnRef>
+            <a:fillRef idx="1">
+              <a:schemeClr val="accent1"/>
+            </a:fillRef>
+            <a:effectRef idx="0">
+              <a:schemeClr val="accent1"/>
+            </a:effectRef>
+            <a:fontRef idx="minor">
+              <a:schemeClr val="lt1"/>
+            </a:fontRef>
+          </p:style>
+          <p:txBody>
+            <a:bodyPr rtlCol="0" anchor="ctr"/>
+            <a:lstStyle/>
+            <a:p>
+              <a:pPr algn="ctr"/>
+              <a:endParaRPr lang="en-IN"/>
+            </a:p>
+          </p:txBody>
+        </p:sp>
+        <p:sp>
+          <p:nvSpPr>
+            <p:cNvPr id="5" name="TextBox 4">
+              <a:extLst>
+                <a:ext uri="{FF2B5EF4-FFF2-40B4-BE49-F238E27FC236}">
+                  <a16:creationId xmlns:a16="http://schemas.microsoft.com/office/drawing/2014/main" id="{BF27783B-E2DA-A0E9-4DA6-6792680BA11C}"/>
+                </a:ext>
+              </a:extLst>
+            </p:cNvPr>
+            <p:cNvSpPr txBox="1"/>
+            <p:nvPr/>
+          </p:nvSpPr>
+          <p:spPr>
+            <a:xfrm>
+              <a:off x="0" y="1975867"/>
+              <a:ext cx="10799762" cy="6848029"/>
+            </a:xfrm>
+            <a:prstGeom prst="rect">
+              <a:avLst/>
+            </a:prstGeom>
             <a:noFill/>
-          </a:ln>
-        </p:spPr>
-        <p:style>
-          <a:lnRef idx="2">
-            <a:schemeClr val="accent1">
-              <a:shade val="15000"/>
-            </a:schemeClr>
-          </a:lnRef>
-          <a:fillRef idx="1">
-            <a:schemeClr val="accent1"/>
-          </a:fillRef>
-          <a:effectRef idx="0">
-            <a:schemeClr val="accent1"/>
-          </a:effectRef>
-          <a:fontRef idx="minor">
-            <a:schemeClr val="lt1"/>
-          </a:fontRef>
-        </p:style>
-        <p:txBody>
-          <a:bodyPr rtlCol="0" anchor="ctr"/>
-          <a:lstStyle/>
-          <a:p>
-            <a:pPr algn="ctr"/>
-            <a:endParaRPr lang="en-IN"/>
-          </a:p>
-        </p:txBody>
-      </p:sp>
-      <p:sp>
-        <p:nvSpPr>
-          <p:cNvPr id="5" name="TextBox 4">
-            <a:extLst>
-              <a:ext uri="{FF2B5EF4-FFF2-40B4-BE49-F238E27FC236}">
-                <a16:creationId xmlns:a16="http://schemas.microsoft.com/office/drawing/2014/main" id="{BF27783B-E2DA-A0E9-4DA6-6792680BA11C}"/>
-              </a:ext>
-            </a:extLst>
-          </p:cNvPr>
-          <p:cNvSpPr txBox="1"/>
-          <p:nvPr/>
-        </p:nvSpPr>
-        <p:spPr>
-          <a:xfrm>
-            <a:off x="0" y="1975867"/>
-            <a:ext cx="10799762" cy="6848029"/>
-          </a:xfrm>
-          <a:prstGeom prst="rect">
-            <a:avLst/>
-          </a:prstGeom>
-          <a:noFill/>
-        </p:spPr>
-        <p:txBody>
-          <a:bodyPr wrap="square" rtlCol="0">
-            <a:spAutoFit/>
-          </a:bodyPr>
-          <a:lstStyle/>
-          <a:p>
-            <a:pPr algn="ctr"/>
-            <a:r>
-              <a:rPr lang="en-GB" sz="43900" dirty="0">
+          </p:spPr>
+          <p:txBody>
+            <a:bodyPr wrap="square" rtlCol="0">
+              <a:spAutoFit/>
+            </a:bodyPr>
+            <a:lstStyle/>
+            <a:p>
+              <a:pPr algn="ctr"/>
+              <a:r>
+                <a:rPr lang="en-GB" sz="43900" dirty="0">
+                  <a:solidFill>
+                    <a:srgbClr val="FF4500"/>
+                  </a:solidFill>
+                  <a:latin typeface="Arial Black" panose="020B0A04020102020204" pitchFamily="34" charset="0"/>
+                  <a:ea typeface="ADLaM Display" panose="02010000000000000000" pitchFamily="2" charset="0"/>
+                  <a:cs typeface="ADLaM Display" panose="02010000000000000000" pitchFamily="2" charset="0"/>
+                </a:rPr>
+                <a:t>PV</a:t>
+              </a:r>
+              <a:endParaRPr lang="en-IN" sz="43900" dirty="0">
                 <a:solidFill>
                   <a:srgbClr val="FF4500"/>
                 </a:solidFill>
                 <a:latin typeface="Arial Black" panose="020B0A04020102020204" pitchFamily="34" charset="0"/>
                 <a:ea typeface="ADLaM Display" panose="02010000000000000000" pitchFamily="2" charset="0"/>
                 <a:cs typeface="ADLaM Display" panose="02010000000000000000" pitchFamily="2" charset="0"/>
-              </a:rPr>
-              <a:t>PV</a:t>
-            </a:r>
-            <a:endParaRPr lang="en-IN" sz="43900" dirty="0">
-              <a:solidFill>
-                <a:srgbClr val="FF4500"/>
-              </a:solidFill>
-              <a:latin typeface="Arial Black" panose="020B0A04020102020204" pitchFamily="34" charset="0"/>
-              <a:ea typeface="ADLaM Display" panose="02010000000000000000" pitchFamily="2" charset="0"/>
-              <a:cs typeface="ADLaM Display" panose="02010000000000000000" pitchFamily="2" charset="0"/>
-            </a:endParaRPr>
-          </a:p>
-        </p:txBody>
-      </p:sp>
+              </a:endParaRPr>
+            </a:p>
+          </p:txBody>
+        </p:sp>
+      </p:grpSp>
     </p:spTree>
     <p:extLst>
       <p:ext uri="{BB962C8B-B14F-4D97-AF65-F5344CB8AC3E}">

--- a/assets/images/PV_logo.pptx
+++ b/assets/images/PV_logo.pptx
@@ -2420,9 +2420,12 @@
 <p:sldMaster xmlns:a="http://schemas.openxmlformats.org/drawingml/2006/main" xmlns:r="http://schemas.openxmlformats.org/officeDocument/2006/relationships" xmlns:p="http://schemas.openxmlformats.org/presentationml/2006/main">
   <p:cSld>
     <p:bg>
-      <p:bgRef idx="1001">
-        <a:schemeClr val="bg1"/>
-      </p:bgRef>
+      <p:bgPr>
+        <a:solidFill>
+          <a:schemeClr val="tx1"/>
+        </a:solidFill>
+        <a:effectLst/>
+      </p:bgPr>
     </p:bg>
     <p:spTree>
       <p:nvGrpSpPr>
@@ -2973,130 +2976,57 @@
           <a:chExt cx="0" cy="0"/>
         </a:xfrm>
       </p:grpSpPr>
-      <p:grpSp>
-        <p:nvGrpSpPr>
-          <p:cNvPr id="3" name="Group 2">
+      <p:sp>
+        <p:nvSpPr>
+          <p:cNvPr id="5" name="TextBox 4">
             <a:extLst>
               <a:ext uri="{FF2B5EF4-FFF2-40B4-BE49-F238E27FC236}">
-                <a16:creationId xmlns:a16="http://schemas.microsoft.com/office/drawing/2014/main" id="{8B8D75D3-03D2-4076-C979-945CBC941AFD}"/>
+                <a16:creationId xmlns:a16="http://schemas.microsoft.com/office/drawing/2014/main" id="{BF27783B-E2DA-A0E9-4DA6-6792680BA11C}"/>
               </a:ext>
             </a:extLst>
           </p:cNvPr>
-          <p:cNvGrpSpPr/>
+          <p:cNvSpPr txBox="1"/>
           <p:nvPr/>
-        </p:nvGrpSpPr>
-        <p:grpSpPr>
+        </p:nvSpPr>
+        <p:spPr>
           <a:xfrm>
-            <a:off x="0" y="0"/>
-            <a:ext cx="10799762" cy="10799762"/>
-            <a:chOff x="0" y="0"/>
-            <a:chExt cx="10799762" cy="10799762"/>
+            <a:off x="0" y="1975867"/>
+            <a:ext cx="10799762" cy="6848029"/>
           </a:xfrm>
-        </p:grpSpPr>
-        <p:sp>
-          <p:nvSpPr>
-            <p:cNvPr id="2" name="Rectangle: Rounded Corners 1">
-              <a:extLst>
-                <a:ext uri="{FF2B5EF4-FFF2-40B4-BE49-F238E27FC236}">
-                  <a16:creationId xmlns:a16="http://schemas.microsoft.com/office/drawing/2014/main" id="{66B8EB38-0CEA-8E24-0679-E1F488268DD9}"/>
-                </a:ext>
-              </a:extLst>
-            </p:cNvPr>
-            <p:cNvSpPr/>
-            <p:nvPr/>
-          </p:nvSpPr>
-          <p:spPr>
-            <a:xfrm>
-              <a:off x="0" y="0"/>
-              <a:ext cx="10799762" cy="10799762"/>
-            </a:xfrm>
-            <a:prstGeom prst="roundRect">
-              <a:avLst/>
-            </a:prstGeom>
-            <a:solidFill>
-              <a:schemeClr val="tx1"/>
-            </a:solidFill>
-            <a:ln>
-              <a:noFill/>
-            </a:ln>
-          </p:spPr>
-          <p:style>
-            <a:lnRef idx="2">
-              <a:schemeClr val="accent1">
-                <a:shade val="15000"/>
-              </a:schemeClr>
-            </a:lnRef>
-            <a:fillRef idx="1">
-              <a:schemeClr val="accent1"/>
-            </a:fillRef>
-            <a:effectRef idx="0">
-              <a:schemeClr val="accent1"/>
-            </a:effectRef>
-            <a:fontRef idx="minor">
-              <a:schemeClr val="lt1"/>
-            </a:fontRef>
-          </p:style>
-          <p:txBody>
-            <a:bodyPr rtlCol="0" anchor="ctr"/>
-            <a:lstStyle/>
-            <a:p>
-              <a:pPr algn="ctr"/>
-              <a:endParaRPr lang="en-IN"/>
-            </a:p>
-          </p:txBody>
-        </p:sp>
-        <p:sp>
-          <p:nvSpPr>
-            <p:cNvPr id="5" name="TextBox 4">
-              <a:extLst>
-                <a:ext uri="{FF2B5EF4-FFF2-40B4-BE49-F238E27FC236}">
-                  <a16:creationId xmlns:a16="http://schemas.microsoft.com/office/drawing/2014/main" id="{BF27783B-E2DA-A0E9-4DA6-6792680BA11C}"/>
-                </a:ext>
-              </a:extLst>
-            </p:cNvPr>
-            <p:cNvSpPr txBox="1"/>
-            <p:nvPr/>
-          </p:nvSpPr>
-          <p:spPr>
-            <a:xfrm>
-              <a:off x="0" y="1975867"/>
-              <a:ext cx="10799762" cy="6848029"/>
-            </a:xfrm>
-            <a:prstGeom prst="rect">
-              <a:avLst/>
-            </a:prstGeom>
-            <a:noFill/>
-          </p:spPr>
-          <p:txBody>
-            <a:bodyPr wrap="square" rtlCol="0">
-              <a:spAutoFit/>
-            </a:bodyPr>
-            <a:lstStyle/>
-            <a:p>
-              <a:pPr algn="ctr"/>
-              <a:r>
-                <a:rPr lang="en-GB" sz="43900" dirty="0">
-                  <a:solidFill>
-                    <a:srgbClr val="FF4500"/>
-                  </a:solidFill>
-                  <a:latin typeface="Arial Black" panose="020B0A04020102020204" pitchFamily="34" charset="0"/>
-                  <a:ea typeface="ADLaM Display" panose="02010000000000000000" pitchFamily="2" charset="0"/>
-                  <a:cs typeface="ADLaM Display" panose="02010000000000000000" pitchFamily="2" charset="0"/>
-                </a:rPr>
-                <a:t>PV</a:t>
-              </a:r>
-              <a:endParaRPr lang="en-IN" sz="43900" dirty="0">
+          <a:prstGeom prst="rect">
+            <a:avLst/>
+          </a:prstGeom>
+          <a:noFill/>
+        </p:spPr>
+        <p:txBody>
+          <a:bodyPr wrap="square" rtlCol="0">
+            <a:spAutoFit/>
+          </a:bodyPr>
+          <a:lstStyle/>
+          <a:p>
+            <a:pPr algn="ctr"/>
+            <a:r>
+              <a:rPr lang="en-GB" sz="43900" dirty="0">
                 <a:solidFill>
                   <a:srgbClr val="FF4500"/>
                 </a:solidFill>
                 <a:latin typeface="Arial Black" panose="020B0A04020102020204" pitchFamily="34" charset="0"/>
                 <a:ea typeface="ADLaM Display" panose="02010000000000000000" pitchFamily="2" charset="0"/>
                 <a:cs typeface="ADLaM Display" panose="02010000000000000000" pitchFamily="2" charset="0"/>
-              </a:endParaRPr>
-            </a:p>
-          </p:txBody>
-        </p:sp>
-      </p:grpSp>
+              </a:rPr>
+              <a:t>PV</a:t>
+            </a:r>
+            <a:endParaRPr lang="en-IN" sz="43900" dirty="0">
+              <a:solidFill>
+                <a:srgbClr val="FF4500"/>
+              </a:solidFill>
+              <a:latin typeface="Arial Black" panose="020B0A04020102020204" pitchFamily="34" charset="0"/>
+              <a:ea typeface="ADLaM Display" panose="02010000000000000000" pitchFamily="2" charset="0"/>
+              <a:cs typeface="ADLaM Display" panose="02010000000000000000" pitchFamily="2" charset="0"/>
+            </a:endParaRPr>
+          </a:p>
+        </p:txBody>
+      </p:sp>
     </p:spTree>
     <p:extLst>
       <p:ext uri="{BB962C8B-B14F-4D97-AF65-F5344CB8AC3E}">

--- a/assets/images/PV_logo.pptx
+++ b/assets/images/PV_logo.pptx
@@ -6,6 +6,7 @@
   </p:sldMasterIdLst>
   <p:sldIdLst>
     <p:sldId id="256" r:id="rId2"/>
+    <p:sldId id="257" r:id="rId3"/>
   </p:sldIdLst>
   <p:sldSz cx="10799763" cy="10799763"/>
   <p:notesSz cx="6858000" cy="9144000"/>
@@ -243,7 +244,7 @@
           <a:p>
             <a:fld id="{CB9327A6-6E4D-4D84-8288-EF901B68E2D9}" type="datetimeFigureOut">
               <a:rPr lang="en-IN" smtClean="0"/>
-              <a:t>23-09-2026</a:t>
+              <a:t>24-09-2026</a:t>
             </a:fld>
             <a:endParaRPr lang="en-IN"/>
           </a:p>
@@ -413,7 +414,7 @@
           <a:p>
             <a:fld id="{CB9327A6-6E4D-4D84-8288-EF901B68E2D9}" type="datetimeFigureOut">
               <a:rPr lang="en-IN" smtClean="0"/>
-              <a:t>23-09-2026</a:t>
+              <a:t>24-09-2026</a:t>
             </a:fld>
             <a:endParaRPr lang="en-IN"/>
           </a:p>
@@ -593,7 +594,7 @@
           <a:p>
             <a:fld id="{CB9327A6-6E4D-4D84-8288-EF901B68E2D9}" type="datetimeFigureOut">
               <a:rPr lang="en-IN" smtClean="0"/>
-              <a:t>23-09-2026</a:t>
+              <a:t>24-09-2026</a:t>
             </a:fld>
             <a:endParaRPr lang="en-IN"/>
           </a:p>
@@ -763,7 +764,7 @@
           <a:p>
             <a:fld id="{CB9327A6-6E4D-4D84-8288-EF901B68E2D9}" type="datetimeFigureOut">
               <a:rPr lang="en-IN" smtClean="0"/>
-              <a:t>23-09-2026</a:t>
+              <a:t>24-09-2026</a:t>
             </a:fld>
             <a:endParaRPr lang="en-IN"/>
           </a:p>
@@ -1009,7 +1010,7 @@
           <a:p>
             <a:fld id="{CB9327A6-6E4D-4D84-8288-EF901B68E2D9}" type="datetimeFigureOut">
               <a:rPr lang="en-IN" smtClean="0"/>
-              <a:t>23-09-2026</a:t>
+              <a:t>24-09-2026</a:t>
             </a:fld>
             <a:endParaRPr lang="en-IN"/>
           </a:p>
@@ -1241,7 +1242,7 @@
           <a:p>
             <a:fld id="{CB9327A6-6E4D-4D84-8288-EF901B68E2D9}" type="datetimeFigureOut">
               <a:rPr lang="en-IN" smtClean="0"/>
-              <a:t>23-09-2026</a:t>
+              <a:t>24-09-2026</a:t>
             </a:fld>
             <a:endParaRPr lang="en-IN"/>
           </a:p>
@@ -1608,7 +1609,7 @@
           <a:p>
             <a:fld id="{CB9327A6-6E4D-4D84-8288-EF901B68E2D9}" type="datetimeFigureOut">
               <a:rPr lang="en-IN" smtClean="0"/>
-              <a:t>23-09-2026</a:t>
+              <a:t>24-09-2026</a:t>
             </a:fld>
             <a:endParaRPr lang="en-IN"/>
           </a:p>
@@ -1726,7 +1727,7 @@
           <a:p>
             <a:fld id="{CB9327A6-6E4D-4D84-8288-EF901B68E2D9}" type="datetimeFigureOut">
               <a:rPr lang="en-IN" smtClean="0"/>
-              <a:t>23-09-2026</a:t>
+              <a:t>24-09-2026</a:t>
             </a:fld>
             <a:endParaRPr lang="en-IN"/>
           </a:p>
@@ -1821,7 +1822,7 @@
           <a:p>
             <a:fld id="{CB9327A6-6E4D-4D84-8288-EF901B68E2D9}" type="datetimeFigureOut">
               <a:rPr lang="en-IN" smtClean="0"/>
-              <a:t>23-09-2026</a:t>
+              <a:t>24-09-2026</a:t>
             </a:fld>
             <a:endParaRPr lang="en-IN"/>
           </a:p>
@@ -2098,7 +2099,7 @@
           <a:p>
             <a:fld id="{CB9327A6-6E4D-4D84-8288-EF901B68E2D9}" type="datetimeFigureOut">
               <a:rPr lang="en-IN" smtClean="0"/>
-              <a:t>23-09-2026</a:t>
+              <a:t>24-09-2026</a:t>
             </a:fld>
             <a:endParaRPr lang="en-IN"/>
           </a:p>
@@ -2355,7 +2356,7 @@
           <a:p>
             <a:fld id="{CB9327A6-6E4D-4D84-8288-EF901B68E2D9}" type="datetimeFigureOut">
               <a:rPr lang="en-IN" smtClean="0"/>
-              <a:t>23-09-2026</a:t>
+              <a:t>24-09-2026</a:t>
             </a:fld>
             <a:endParaRPr lang="en-IN"/>
           </a:p>
@@ -2571,7 +2572,7 @@
           <a:p>
             <a:fld id="{CB9327A6-6E4D-4D84-8288-EF901B68E2D9}" type="datetimeFigureOut">
               <a:rPr lang="en-IN" smtClean="0"/>
-              <a:t>23-09-2026</a:t>
+              <a:t>24-09-2026</a:t>
             </a:fld>
             <a:endParaRPr lang="en-IN"/>
           </a:p>
@@ -3031,6 +3032,93 @@
     <p:extLst>
       <p:ext uri="{BB962C8B-B14F-4D97-AF65-F5344CB8AC3E}">
         <p14:creationId xmlns:p14="http://schemas.microsoft.com/office/powerpoint/2010/main" val="2272296398"/>
+      </p:ext>
+    </p:extLst>
+  </p:cSld>
+  <p:clrMapOvr>
+    <a:masterClrMapping/>
+  </p:clrMapOvr>
+</p:sld>
+</file>
+
+<file path=ppt/slides/slide2.xml><?xml version="1.0" encoding="utf-8"?>
+<p:sld xmlns:a="http://schemas.openxmlformats.org/drawingml/2006/main" xmlns:r="http://schemas.openxmlformats.org/officeDocument/2006/relationships" xmlns:p="http://schemas.openxmlformats.org/presentationml/2006/main">
+  <p:cSld>
+    <p:spTree>
+      <p:nvGrpSpPr>
+        <p:cNvPr id="1" name="">
+          <a:extLst>
+            <a:ext uri="{FF2B5EF4-FFF2-40B4-BE49-F238E27FC236}">
+              <a16:creationId xmlns:a16="http://schemas.microsoft.com/office/drawing/2014/main" id="{9588BEA6-0E7E-79BE-3D13-AD81B56A4827}"/>
+            </a:ext>
+          </a:extLst>
+        </p:cNvPr>
+        <p:cNvGrpSpPr/>
+        <p:nvPr/>
+      </p:nvGrpSpPr>
+      <p:grpSpPr>
+        <a:xfrm>
+          <a:off x="0" y="0"/>
+          <a:ext cx="0" cy="0"/>
+          <a:chOff x="0" y="0"/>
+          <a:chExt cx="0" cy="0"/>
+        </a:xfrm>
+      </p:grpSpPr>
+      <p:sp>
+        <p:nvSpPr>
+          <p:cNvPr id="5" name="TextBox 4">
+            <a:extLst>
+              <a:ext uri="{FF2B5EF4-FFF2-40B4-BE49-F238E27FC236}">
+                <a16:creationId xmlns:a16="http://schemas.microsoft.com/office/drawing/2014/main" id="{003CF23D-3C1B-2D52-1F8F-12FDA4155A31}"/>
+              </a:ext>
+            </a:extLst>
+          </p:cNvPr>
+          <p:cNvSpPr txBox="1"/>
+          <p:nvPr/>
+        </p:nvSpPr>
+        <p:spPr>
+          <a:xfrm>
+            <a:off x="0" y="1975867"/>
+            <a:ext cx="10799762" cy="6848029"/>
+          </a:xfrm>
+          <a:prstGeom prst="rect">
+            <a:avLst/>
+          </a:prstGeom>
+          <a:noFill/>
+        </p:spPr>
+        <p:txBody>
+          <a:bodyPr wrap="square" rtlCol="0">
+            <a:spAutoFit/>
+          </a:bodyPr>
+          <a:lstStyle/>
+          <a:p>
+            <a:pPr algn="ctr"/>
+            <a:r>
+              <a:rPr lang="en-GB" sz="43900" dirty="0">
+                <a:solidFill>
+                  <a:schemeClr val="bg1"/>
+                </a:solidFill>
+                <a:latin typeface="Arial Black" panose="020B0A04020102020204" pitchFamily="34" charset="0"/>
+                <a:ea typeface="ADLaM Display" panose="02010000000000000000" pitchFamily="2" charset="0"/>
+                <a:cs typeface="ADLaM Display" panose="02010000000000000000" pitchFamily="2" charset="0"/>
+              </a:rPr>
+              <a:t>PV</a:t>
+            </a:r>
+            <a:endParaRPr lang="en-IN" sz="43900" dirty="0">
+              <a:solidFill>
+                <a:schemeClr val="bg1"/>
+              </a:solidFill>
+              <a:latin typeface="Arial Black" panose="020B0A04020102020204" pitchFamily="34" charset="0"/>
+              <a:ea typeface="ADLaM Display" panose="02010000000000000000" pitchFamily="2" charset="0"/>
+              <a:cs typeface="ADLaM Display" panose="02010000000000000000" pitchFamily="2" charset="0"/>
+            </a:endParaRPr>
+          </a:p>
+        </p:txBody>
+      </p:sp>
+    </p:spTree>
+    <p:extLst>
+      <p:ext uri="{BB962C8B-B14F-4D97-AF65-F5344CB8AC3E}">
+        <p14:creationId xmlns:p14="http://schemas.microsoft.com/office/powerpoint/2010/main" val="2202805119"/>
       </p:ext>
     </p:extLst>
   </p:cSld>

--- a/assets/images/PV_logo.pptx
+++ b/assets/images/PV_logo.pptx
@@ -6,7 +6,11 @@
   </p:sldMasterIdLst>
   <p:sldIdLst>
     <p:sldId id="256" r:id="rId2"/>
-    <p:sldId id="257" r:id="rId3"/>
+    <p:sldId id="258" r:id="rId3"/>
+    <p:sldId id="261" r:id="rId4"/>
+    <p:sldId id="257" r:id="rId5"/>
+    <p:sldId id="259" r:id="rId6"/>
+    <p:sldId id="260" r:id="rId7"/>
   </p:sldIdLst>
   <p:sldSz cx="10799763" cy="10799763"/>
   <p:notesSz cx="6858000" cy="9144000"/>
@@ -3049,6 +3053,202 @@
         <p:cNvPr id="1" name="">
           <a:extLst>
             <a:ext uri="{FF2B5EF4-FFF2-40B4-BE49-F238E27FC236}">
+              <a16:creationId xmlns:a16="http://schemas.microsoft.com/office/drawing/2014/main" id="{61EC30C3-DD72-A072-DF9E-9BF79F660F08}"/>
+            </a:ext>
+          </a:extLst>
+        </p:cNvPr>
+        <p:cNvGrpSpPr/>
+        <p:nvPr/>
+      </p:nvGrpSpPr>
+      <p:grpSpPr>
+        <a:xfrm>
+          <a:off x="0" y="0"/>
+          <a:ext cx="0" cy="0"/>
+          <a:chOff x="0" y="0"/>
+          <a:chExt cx="0" cy="0"/>
+        </a:xfrm>
+      </p:grpSpPr>
+      <p:sp>
+        <p:nvSpPr>
+          <p:cNvPr id="5" name="TextBox 4">
+            <a:extLst>
+              <a:ext uri="{FF2B5EF4-FFF2-40B4-BE49-F238E27FC236}">
+                <a16:creationId xmlns:a16="http://schemas.microsoft.com/office/drawing/2014/main" id="{2FB0183E-A8F2-13C0-AB2B-1EEEB1E6BF1A}"/>
+              </a:ext>
+            </a:extLst>
+          </p:cNvPr>
+          <p:cNvSpPr txBox="1"/>
+          <p:nvPr/>
+        </p:nvSpPr>
+        <p:spPr>
+          <a:xfrm>
+            <a:off x="1" y="3399333"/>
+            <a:ext cx="10799762" cy="4001095"/>
+          </a:xfrm>
+          <a:prstGeom prst="rect">
+            <a:avLst/>
+          </a:prstGeom>
+          <a:noFill/>
+        </p:spPr>
+        <p:txBody>
+          <a:bodyPr wrap="square" rtlCol="0">
+            <a:spAutoFit/>
+          </a:bodyPr>
+          <a:lstStyle/>
+          <a:p>
+            <a:pPr algn="ctr"/>
+            <a:r>
+              <a:rPr lang="en-GB" sz="25400" dirty="0">
+                <a:solidFill>
+                  <a:schemeClr val="bg1"/>
+                </a:solidFill>
+                <a:latin typeface="Arial Black" panose="020B0A04020102020204" pitchFamily="34" charset="0"/>
+                <a:ea typeface="ADLaM Display" panose="02010000000000000000" pitchFamily="2" charset="0"/>
+                <a:cs typeface="ADLaM Display" panose="02010000000000000000" pitchFamily="2" charset="0"/>
+              </a:rPr>
+              <a:t>&lt;/PV&gt;</a:t>
+            </a:r>
+            <a:endParaRPr lang="en-IN" sz="25400" dirty="0">
+              <a:solidFill>
+                <a:schemeClr val="bg1"/>
+              </a:solidFill>
+              <a:latin typeface="Arial Black" panose="020B0A04020102020204" pitchFamily="34" charset="0"/>
+              <a:ea typeface="ADLaM Display" panose="02010000000000000000" pitchFamily="2" charset="0"/>
+              <a:cs typeface="ADLaM Display" panose="02010000000000000000" pitchFamily="2" charset="0"/>
+            </a:endParaRPr>
+          </a:p>
+        </p:txBody>
+      </p:sp>
+    </p:spTree>
+    <p:extLst>
+      <p:ext uri="{BB962C8B-B14F-4D97-AF65-F5344CB8AC3E}">
+        <p14:creationId xmlns:p14="http://schemas.microsoft.com/office/powerpoint/2010/main" val="3646611041"/>
+      </p:ext>
+    </p:extLst>
+  </p:cSld>
+  <p:clrMapOvr>
+    <a:masterClrMapping/>
+  </p:clrMapOvr>
+</p:sld>
+</file>
+
+<file path=ppt/slides/slide3.xml><?xml version="1.0" encoding="utf-8"?>
+<p:sld xmlns:a="http://schemas.openxmlformats.org/drawingml/2006/main" xmlns:r="http://schemas.openxmlformats.org/officeDocument/2006/relationships" xmlns:p="http://schemas.openxmlformats.org/presentationml/2006/main">
+  <p:cSld>
+    <p:spTree>
+      <p:nvGrpSpPr>
+        <p:cNvPr id="1" name="">
+          <a:extLst>
+            <a:ext uri="{FF2B5EF4-FFF2-40B4-BE49-F238E27FC236}">
+              <a16:creationId xmlns:a16="http://schemas.microsoft.com/office/drawing/2014/main" id="{7D1627CA-7344-35E3-7D55-D9AB65BF471B}"/>
+            </a:ext>
+          </a:extLst>
+        </p:cNvPr>
+        <p:cNvGrpSpPr/>
+        <p:nvPr/>
+      </p:nvGrpSpPr>
+      <p:grpSpPr>
+        <a:xfrm>
+          <a:off x="0" y="0"/>
+          <a:ext cx="0" cy="0"/>
+          <a:chOff x="0" y="0"/>
+          <a:chExt cx="0" cy="0"/>
+        </a:xfrm>
+      </p:grpSpPr>
+      <p:sp>
+        <p:nvSpPr>
+          <p:cNvPr id="5" name="TextBox 4">
+            <a:extLst>
+              <a:ext uri="{FF2B5EF4-FFF2-40B4-BE49-F238E27FC236}">
+                <a16:creationId xmlns:a16="http://schemas.microsoft.com/office/drawing/2014/main" id="{167523B0-3C21-00BE-C83B-AAA7901C2F1C}"/>
+              </a:ext>
+            </a:extLst>
+          </p:cNvPr>
+          <p:cNvSpPr txBox="1"/>
+          <p:nvPr/>
+        </p:nvSpPr>
+        <p:spPr>
+          <a:xfrm>
+            <a:off x="1" y="3399333"/>
+            <a:ext cx="10799762" cy="4001095"/>
+          </a:xfrm>
+          <a:prstGeom prst="rect">
+            <a:avLst/>
+          </a:prstGeom>
+          <a:noFill/>
+        </p:spPr>
+        <p:txBody>
+          <a:bodyPr wrap="square" rtlCol="0">
+            <a:spAutoFit/>
+          </a:bodyPr>
+          <a:lstStyle/>
+          <a:p>
+            <a:pPr algn="ctr"/>
+            <a:r>
+              <a:rPr lang="en-GB" sz="25400" dirty="0">
+                <a:solidFill>
+                  <a:schemeClr val="bg1"/>
+                </a:solidFill>
+                <a:latin typeface="Arial Black" panose="020B0A04020102020204" pitchFamily="34" charset="0"/>
+                <a:ea typeface="ADLaM Display" panose="02010000000000000000" pitchFamily="2" charset="0"/>
+                <a:cs typeface="ADLaM Display" panose="02010000000000000000" pitchFamily="2" charset="0"/>
+              </a:rPr>
+              <a:t>&lt;</a:t>
+            </a:r>
+            <a:r>
+              <a:rPr lang="en-GB" sz="25400" dirty="0">
+                <a:solidFill>
+                  <a:srgbClr val="FF4500"/>
+                </a:solidFill>
+                <a:latin typeface="Arial Black" panose="020B0A04020102020204" pitchFamily="34" charset="0"/>
+                <a:ea typeface="ADLaM Display" panose="02010000000000000000" pitchFamily="2" charset="0"/>
+                <a:cs typeface="ADLaM Display" panose="02010000000000000000" pitchFamily="2" charset="0"/>
+              </a:rPr>
+              <a:t>/</a:t>
+            </a:r>
+            <a:r>
+              <a:rPr lang="en-GB" sz="25400" dirty="0">
+                <a:solidFill>
+                  <a:schemeClr val="bg1"/>
+                </a:solidFill>
+                <a:latin typeface="Arial Black" panose="020B0A04020102020204" pitchFamily="34" charset="0"/>
+                <a:ea typeface="ADLaM Display" panose="02010000000000000000" pitchFamily="2" charset="0"/>
+                <a:cs typeface="ADLaM Display" panose="02010000000000000000" pitchFamily="2" charset="0"/>
+              </a:rPr>
+              <a:t>PV&gt;</a:t>
+            </a:r>
+            <a:endParaRPr lang="en-IN" sz="25400" dirty="0">
+              <a:solidFill>
+                <a:schemeClr val="bg1"/>
+              </a:solidFill>
+              <a:latin typeface="Arial Black" panose="020B0A04020102020204" pitchFamily="34" charset="0"/>
+              <a:ea typeface="ADLaM Display" panose="02010000000000000000" pitchFamily="2" charset="0"/>
+              <a:cs typeface="ADLaM Display" panose="02010000000000000000" pitchFamily="2" charset="0"/>
+            </a:endParaRPr>
+          </a:p>
+        </p:txBody>
+      </p:sp>
+    </p:spTree>
+    <p:extLst>
+      <p:ext uri="{BB962C8B-B14F-4D97-AF65-F5344CB8AC3E}">
+        <p14:creationId xmlns:p14="http://schemas.microsoft.com/office/powerpoint/2010/main" val="3974035085"/>
+      </p:ext>
+    </p:extLst>
+  </p:cSld>
+  <p:clrMapOvr>
+    <a:masterClrMapping/>
+  </p:clrMapOvr>
+</p:sld>
+</file>
+
+<file path=ppt/slides/slide4.xml><?xml version="1.0" encoding="utf-8"?>
+<p:sld xmlns:a="http://schemas.openxmlformats.org/drawingml/2006/main" xmlns:r="http://schemas.openxmlformats.org/officeDocument/2006/relationships" xmlns:p="http://schemas.openxmlformats.org/presentationml/2006/main">
+  <p:cSld>
+    <p:spTree>
+      <p:nvGrpSpPr>
+        <p:cNvPr id="1" name="">
+          <a:extLst>
+            <a:ext uri="{FF2B5EF4-FFF2-40B4-BE49-F238E27FC236}">
               <a16:creationId xmlns:a16="http://schemas.microsoft.com/office/drawing/2014/main" id="{9588BEA6-0E7E-79BE-3D13-AD81B56A4827}"/>
             </a:ext>
           </a:extLst>
@@ -3119,6 +3319,160 @@
     <p:extLst>
       <p:ext uri="{BB962C8B-B14F-4D97-AF65-F5344CB8AC3E}">
         <p14:creationId xmlns:p14="http://schemas.microsoft.com/office/powerpoint/2010/main" val="2202805119"/>
+      </p:ext>
+    </p:extLst>
+  </p:cSld>
+  <p:clrMapOvr>
+    <a:masterClrMapping/>
+  </p:clrMapOvr>
+</p:sld>
+</file>
+
+<file path=ppt/slides/slide5.xml><?xml version="1.0" encoding="utf-8"?>
+<p:sld xmlns:a="http://schemas.openxmlformats.org/drawingml/2006/main" xmlns:r="http://schemas.openxmlformats.org/officeDocument/2006/relationships" xmlns:p="http://schemas.openxmlformats.org/presentationml/2006/main">
+  <p:cSld>
+    <p:spTree>
+      <p:nvGrpSpPr>
+        <p:cNvPr id="1" name="">
+          <a:extLst>
+            <a:ext uri="{FF2B5EF4-FFF2-40B4-BE49-F238E27FC236}">
+              <a16:creationId xmlns:a16="http://schemas.microsoft.com/office/drawing/2014/main" id="{661CDA75-FC03-6A8F-7D9B-D2481D257F54}"/>
+            </a:ext>
+          </a:extLst>
+        </p:cNvPr>
+        <p:cNvGrpSpPr/>
+        <p:nvPr/>
+      </p:nvGrpSpPr>
+      <p:grpSpPr>
+        <a:xfrm>
+          <a:off x="0" y="0"/>
+          <a:ext cx="0" cy="0"/>
+          <a:chOff x="0" y="0"/>
+          <a:chExt cx="0" cy="0"/>
+        </a:xfrm>
+      </p:grpSpPr>
+      <p:pic>
+        <p:nvPicPr>
+          <p:cNvPr id="3" name="Picture 2">
+            <a:extLst>
+              <a:ext uri="{FF2B5EF4-FFF2-40B4-BE49-F238E27FC236}">
+                <a16:creationId xmlns:a16="http://schemas.microsoft.com/office/drawing/2014/main" id="{6445264C-3B2F-9335-A46E-AE66D73C883F}"/>
+              </a:ext>
+            </a:extLst>
+          </p:cNvPr>
+          <p:cNvPicPr>
+            <a:picLocks noChangeAspect="1"/>
+          </p:cNvPicPr>
+          <p:nvPr/>
+        </p:nvPicPr>
+        <p:blipFill>
+          <a:blip r:embed="rId2">
+            <a:extLst>
+              <a:ext uri="{28A0092B-C50C-407E-A947-70E740481C1C}">
+                <a14:useLocalDpi xmlns:a14="http://schemas.microsoft.com/office/drawing/2010/main" val="0"/>
+              </a:ext>
+            </a:extLst>
+          </a:blip>
+          <a:srcRect l="16669" t="13894" r="15728" b="22406"/>
+          <a:stretch>
+            <a:fillRect/>
+          </a:stretch>
+        </p:blipFill>
+        <p:spPr>
+          <a:xfrm>
+            <a:off x="0" y="2007783"/>
+            <a:ext cx="10799763" cy="6784195"/>
+          </a:xfrm>
+          <a:prstGeom prst="rect">
+            <a:avLst/>
+          </a:prstGeom>
+        </p:spPr>
+      </p:pic>
+    </p:spTree>
+    <p:extLst>
+      <p:ext uri="{BB962C8B-B14F-4D97-AF65-F5344CB8AC3E}">
+        <p14:creationId xmlns:p14="http://schemas.microsoft.com/office/powerpoint/2010/main" val="1938209154"/>
+      </p:ext>
+    </p:extLst>
+  </p:cSld>
+  <p:clrMapOvr>
+    <a:masterClrMapping/>
+  </p:clrMapOvr>
+</p:sld>
+</file>
+
+<file path=ppt/slides/slide6.xml><?xml version="1.0" encoding="utf-8"?>
+<p:sld xmlns:a="http://schemas.openxmlformats.org/drawingml/2006/main" xmlns:r="http://schemas.openxmlformats.org/officeDocument/2006/relationships" xmlns:p="http://schemas.openxmlformats.org/presentationml/2006/main">
+  <p:cSld>
+    <p:bg>
+      <p:bgPr>
+        <a:solidFill>
+          <a:schemeClr val="bg1"/>
+        </a:solidFill>
+        <a:effectLst/>
+      </p:bgPr>
+    </p:bg>
+    <p:spTree>
+      <p:nvGrpSpPr>
+        <p:cNvPr id="1" name="">
+          <a:extLst>
+            <a:ext uri="{FF2B5EF4-FFF2-40B4-BE49-F238E27FC236}">
+              <a16:creationId xmlns:a16="http://schemas.microsoft.com/office/drawing/2014/main" id="{EB5B678B-DB98-B092-BFE7-43FBDC1C6C77}"/>
+            </a:ext>
+          </a:extLst>
+        </p:cNvPr>
+        <p:cNvGrpSpPr/>
+        <p:nvPr/>
+      </p:nvGrpSpPr>
+      <p:grpSpPr>
+        <a:xfrm>
+          <a:off x="0" y="0"/>
+          <a:ext cx="0" cy="0"/>
+          <a:chOff x="0" y="0"/>
+          <a:chExt cx="0" cy="0"/>
+        </a:xfrm>
+      </p:grpSpPr>
+      <p:pic>
+        <p:nvPicPr>
+          <p:cNvPr id="3" name="Picture 2">
+            <a:extLst>
+              <a:ext uri="{FF2B5EF4-FFF2-40B4-BE49-F238E27FC236}">
+                <a16:creationId xmlns:a16="http://schemas.microsoft.com/office/drawing/2014/main" id="{D58E3348-84CC-409F-C8DC-D23A370A1446}"/>
+              </a:ext>
+            </a:extLst>
+          </p:cNvPr>
+          <p:cNvPicPr>
+            <a:picLocks noChangeAspect="1"/>
+          </p:cNvPicPr>
+          <p:nvPr/>
+        </p:nvPicPr>
+        <p:blipFill>
+          <a:blip r:embed="rId2">
+            <a:extLst>
+              <a:ext uri="{28A0092B-C50C-407E-A947-70E740481C1C}">
+                <a14:useLocalDpi xmlns:a14="http://schemas.microsoft.com/office/drawing/2010/main" val="0"/>
+              </a:ext>
+            </a:extLst>
+          </a:blip>
+          <a:srcRect l="16669" t="13894" r="15728" b="22406"/>
+          <a:stretch>
+            <a:fillRect/>
+          </a:stretch>
+        </p:blipFill>
+        <p:spPr>
+          <a:xfrm>
+            <a:off x="0" y="2007783"/>
+            <a:ext cx="10799763" cy="6784195"/>
+          </a:xfrm>
+          <a:prstGeom prst="rect">
+            <a:avLst/>
+          </a:prstGeom>
+        </p:spPr>
+      </p:pic>
+    </p:spTree>
+    <p:extLst>
+      <p:ext uri="{BB962C8B-B14F-4D97-AF65-F5344CB8AC3E}">
+        <p14:creationId xmlns:p14="http://schemas.microsoft.com/office/powerpoint/2010/main" val="2655419622"/>
       </p:ext>
     </p:extLst>
   </p:cSld>
